--- a/generated/Tier 1 Broker Scorecards/Streetsmart Risk Managers Inc_Broker_Scorecard.pptx
+++ b/generated/Tier 1 Broker Scorecards/Streetsmart Risk Managers Inc_Broker_Scorecard.pptx
@@ -3394,7 +3394,7 @@
                         <a:rPr sz="900">
                           <a:latin typeface="Segoe UI"/>
                         </a:rPr>
-                        <a:t>Tier 1  |  4.05% / 15.00%</a:t>
+                        <a:t>Tier 1  |  4.03% / 15.00%</a:t>
                       </a:r>
                     </a:p>
                   </a:txBody>
@@ -3766,7 +3766,7 @@
                         <a:rPr sz="900">
                           <a:latin typeface="Segoe UI"/>
                         </a:rPr>
-                        <a:t>Non-Fleet Subs: 316  |  Binds: 14</a:t>
+                        <a:t>Non-Fleet Subs: 317  |  Binds: 14</a:t>
                       </a:r>
                     </a:p>
                   </a:txBody>
@@ -4428,7 +4428,7 @@
                           </a:solidFill>
                           <a:latin typeface="Segoe UI"/>
                         </a:rPr>
-                        <a:t>41</a:t>
+                        <a:t>42</a:t>
                       </a:r>
                     </a:p>
                   </a:txBody>
@@ -4747,7 +4747,7 @@
                         <a:rPr sz="800">
                           <a:latin typeface="Segoe UI"/>
                         </a:rPr>
-                        <a:t>11.3%</a:t>
+                        <a:t>12.9%</a:t>
                       </a:r>
                     </a:p>
                   </a:txBody>
@@ -5017,7 +5017,7 @@
                         <a:rPr sz="800">
                           <a:latin typeface="Segoe UI"/>
                         </a:rPr>
-                        <a:t>7</a:t>
+                        <a:t>8</a:t>
                       </a:r>
                     </a:p>
                   </a:txBody>

--- a/generated/Tier 1 Broker Scorecards/Streetsmart Risk Managers Inc_Broker_Scorecard.pptx
+++ b/generated/Tier 1 Broker Scorecards/Streetsmart Risk Managers Inc_Broker_Scorecard.pptx
@@ -3394,7 +3394,7 @@
                         <a:rPr sz="900">
                           <a:latin typeface="Segoe UI"/>
                         </a:rPr>
-                        <a:t>Tier 1  |  4.03% / 15.00%</a:t>
+                        <a:t>Tier 1  |  3.68% / 15.00%</a:t>
                       </a:r>
                     </a:p>
                   </a:txBody>
@@ -3766,7 +3766,7 @@
                         <a:rPr sz="900">
                           <a:latin typeface="Segoe UI"/>
                         </a:rPr>
-                        <a:t>Non-Fleet Subs: 317  |  Binds: 14</a:t>
+                        <a:t>Non-Fleet Subs: 323  |  Binds: 13</a:t>
                       </a:r>
                     </a:p>
                   </a:txBody>
@@ -4428,7 +4428,7 @@
                           </a:solidFill>
                           <a:latin typeface="Segoe UI"/>
                         </a:rPr>
-                        <a:t>42</a:t>
+                        <a:t>49</a:t>
                       </a:r>
                     </a:p>
                   </a:txBody>
@@ -4707,7 +4707,7 @@
                           </a:solidFill>
                           <a:latin typeface="Segoe UI"/>
                         </a:rPr>
-                        <a:t>2.4%</a:t>
+                        <a:t>2.0%</a:t>
                       </a:r>
                     </a:p>
                   </a:txBody>
@@ -4747,7 +4747,7 @@
                         <a:rPr sz="800">
                           <a:latin typeface="Segoe UI"/>
                         </a:rPr>
-                        <a:t>12.9%</a:t>
+                        <a:t>11.3%</a:t>
                       </a:r>
                     </a:p>
                   </a:txBody>
@@ -5017,7 +5017,7 @@
                         <a:rPr sz="800">
                           <a:latin typeface="Segoe UI"/>
                         </a:rPr>
-                        <a:t>8</a:t>
+                        <a:t>7</a:t>
                       </a:r>
                     </a:p>
                   </a:txBody>

--- a/generated/Tier 1 Broker Scorecards/Streetsmart Risk Managers Inc_Broker_Scorecard.pptx
+++ b/generated/Tier 1 Broker Scorecards/Streetsmart Risk Managers Inc_Broker_Scorecard.pptx
@@ -3394,7 +3394,7 @@
                         <a:rPr sz="900">
                           <a:latin typeface="Segoe UI"/>
                         </a:rPr>
-                        <a:t>Tier 1  |  3.68% / 15.00%</a:t>
+                        <a:t>Tier 1  |  3.37% / 15.00%</a:t>
                       </a:r>
                     </a:p>
                   </a:txBody>
@@ -3766,7 +3766,7 @@
                         <a:rPr sz="900">
                           <a:latin typeface="Segoe UI"/>
                         </a:rPr>
-                        <a:t>Non-Fleet Subs: 323  |  Binds: 13</a:t>
+                        <a:t>Non-Fleet Subs: 326  |  Binds: 12</a:t>
                       </a:r>
                     </a:p>
                   </a:txBody>
@@ -4428,7 +4428,7 @@
                           </a:solidFill>
                           <a:latin typeface="Segoe UI"/>
                         </a:rPr>
-                        <a:t>49</a:t>
+                        <a:t>53</a:t>
                       </a:r>
                     </a:p>
                   </a:txBody>
@@ -4707,7 +4707,7 @@
                           </a:solidFill>
                           <a:latin typeface="Segoe UI"/>
                         </a:rPr>
-                        <a:t>2.0%</a:t>
+                        <a:t>1.9%</a:t>
                       </a:r>
                     </a:p>
                   </a:txBody>
@@ -4747,7 +4747,7 @@
                         <a:rPr sz="800">
                           <a:latin typeface="Segoe UI"/>
                         </a:rPr>
-                        <a:t>11.3%</a:t>
+                        <a:t>12.9%</a:t>
                       </a:r>
                     </a:p>
                   </a:txBody>
@@ -5017,7 +5017,7 @@
                         <a:rPr sz="800">
                           <a:latin typeface="Segoe UI"/>
                         </a:rPr>
-                        <a:t>7</a:t>
+                        <a:t>8</a:t>
                       </a:r>
                     </a:p>
                   </a:txBody>

--- a/generated/Tier 1 Broker Scorecards/Streetsmart Risk Managers Inc_Broker_Scorecard.pptx
+++ b/generated/Tier 1 Broker Scorecards/Streetsmart Risk Managers Inc_Broker_Scorecard.pptx
@@ -3394,7 +3394,7 @@
                         <a:rPr sz="900">
                           <a:latin typeface="Segoe UI"/>
                         </a:rPr>
-                        <a:t>Tier 1  |  3.37% / 15.00%</a:t>
+                        <a:t>Tier 1  |  3.33% / 15.00%</a:t>
                       </a:r>
                     </a:p>
                   </a:txBody>
@@ -3766,7 +3766,7 @@
                         <a:rPr sz="900">
                           <a:latin typeface="Segoe UI"/>
                         </a:rPr>
-                        <a:t>Non-Fleet Subs: 326  |  Binds: 12</a:t>
+                        <a:t>Non-Fleet Subs: 330  |  Binds: 12</a:t>
                       </a:r>
                     </a:p>
                   </a:txBody>
@@ -4428,7 +4428,7 @@
                           </a:solidFill>
                           <a:latin typeface="Segoe UI"/>
                         </a:rPr>
-                        <a:t>53</a:t>
+                        <a:t>57</a:t>
                       </a:r>
                     </a:p>
                   </a:txBody>
@@ -4707,7 +4707,7 @@
                           </a:solidFill>
                           <a:latin typeface="Segoe UI"/>
                         </a:rPr>
-                        <a:t>1.9%</a:t>
+                        <a:t>1.8%</a:t>
                       </a:r>
                     </a:p>
                   </a:txBody>
@@ -4747,7 +4747,7 @@
                         <a:rPr sz="800">
                           <a:latin typeface="Segoe UI"/>
                         </a:rPr>
-                        <a:t>12.9%</a:t>
+                        <a:t>11.3%</a:t>
                       </a:r>
                     </a:p>
                   </a:txBody>
@@ -5017,7 +5017,7 @@
                         <a:rPr sz="800">
                           <a:latin typeface="Segoe UI"/>
                         </a:rPr>
-                        <a:t>8</a:t>
+                        <a:t>7</a:t>
                       </a:r>
                     </a:p>
                   </a:txBody>

--- a/generated/Tier 1 Broker Scorecards/Streetsmart Risk Managers Inc_Broker_Scorecard.pptx
+++ b/generated/Tier 1 Broker Scorecards/Streetsmart Risk Managers Inc_Broker_Scorecard.pptx
@@ -3394,7 +3394,7 @@
                         <a:rPr sz="900">
                           <a:latin typeface="Segoe UI"/>
                         </a:rPr>
-                        <a:t>Tier 1  |  3.33% / 15.00%</a:t>
+                        <a:t>Tier 1  |  3.31% / 15.00%</a:t>
                       </a:r>
                     </a:p>
                   </a:txBody>
@@ -3766,7 +3766,7 @@
                         <a:rPr sz="900">
                           <a:latin typeface="Segoe UI"/>
                         </a:rPr>
-                        <a:t>Non-Fleet Subs: 330  |  Binds: 12</a:t>
+                        <a:t>Non-Fleet Subs: 333  |  Binds: 12</a:t>
                       </a:r>
                     </a:p>
                   </a:txBody>
@@ -4428,7 +4428,7 @@
                           </a:solidFill>
                           <a:latin typeface="Segoe UI"/>
                         </a:rPr>
-                        <a:t>57</a:t>
+                        <a:t>60</a:t>
                       </a:r>
                     </a:p>
                   </a:txBody>
@@ -4707,7 +4707,7 @@
                           </a:solidFill>
                           <a:latin typeface="Segoe UI"/>
                         </a:rPr>
-                        <a:t>1.8%</a:t>
+                        <a:t>1.7%</a:t>
                       </a:r>
                     </a:p>
                   </a:txBody>
@@ -4747,7 +4747,7 @@
                         <a:rPr sz="800">
                           <a:latin typeface="Segoe UI"/>
                         </a:rPr>
-                        <a:t>11.3%</a:t>
+                        <a:t>12.9%</a:t>
                       </a:r>
                     </a:p>
                   </a:txBody>
@@ -5017,7 +5017,7 @@
                         <a:rPr sz="800">
                           <a:latin typeface="Segoe UI"/>
                         </a:rPr>
-                        <a:t>7</a:t>
+                        <a:t>8</a:t>
                       </a:r>
                     </a:p>
                   </a:txBody>

--- a/generated/Tier 1 Broker Scorecards/Streetsmart Risk Managers Inc_Broker_Scorecard.pptx
+++ b/generated/Tier 1 Broker Scorecards/Streetsmart Risk Managers Inc_Broker_Scorecard.pptx
@@ -4747,7 +4747,7 @@
                         <a:rPr sz="800">
                           <a:latin typeface="Segoe UI"/>
                         </a:rPr>
-                        <a:t>12.9%</a:t>
+                        <a:t>14.5%</a:t>
                       </a:r>
                     </a:p>
                   </a:txBody>
@@ -5017,7 +5017,7 @@
                         <a:rPr sz="800">
                           <a:latin typeface="Segoe UI"/>
                         </a:rPr>
-                        <a:t>8</a:t>
+                        <a:t>9</a:t>
                       </a:r>
                     </a:p>
                   </a:txBody>

--- a/generated/Tier 1 Broker Scorecards/Streetsmart Risk Managers Inc_Broker_Scorecard.pptx
+++ b/generated/Tier 1 Broker Scorecards/Streetsmart Risk Managers Inc_Broker_Scorecard.pptx
@@ -3357,7 +3357,7 @@
                         <a:rPr sz="800">
                           <a:latin typeface="Segoe UI"/>
                         </a:rPr>
-                        <a:t>$1,382,793.83 / $1,190,504.29 / $260,293.08</a:t>
+                        <a:t>$1,382,793.83 / $1,205,943.29 / $275,732.08</a:t>
                       </a:r>
                     </a:p>
                   </a:txBody>
@@ -3394,7 +3394,7 @@
                         <a:rPr sz="900">
                           <a:latin typeface="Segoe UI"/>
                         </a:rPr>
-                        <a:t>Tier 1  |  3.31% / 15.00%</a:t>
+                        <a:t>Tier 1  |  3.56% / 15.00%</a:t>
                       </a:r>
                     </a:p>
                   </a:txBody>
@@ -3431,7 +3431,7 @@
                         <a:rPr sz="900">
                           <a:latin typeface="Segoe UI"/>
                         </a:rPr>
-                        <a:t>$1,935,911.36  (13.4% achieved)</a:t>
+                        <a:t>$1,935,911.36  (14.2% achieved)</a:t>
                       </a:r>
                     </a:p>
                   </a:txBody>
@@ -3766,7 +3766,7 @@
                         <a:rPr sz="900">
                           <a:latin typeface="Segoe UI"/>
                         </a:rPr>
-                        <a:t>Non-Fleet Subs: 333  |  Binds: 12</a:t>
+                        <a:t>Non-Fleet Subs: 335  |  Binds: 13</a:t>
                       </a:r>
                     </a:p>
                   </a:txBody>
@@ -3803,7 +3803,7 @@
                         <a:rPr sz="900">
                           <a:latin typeface="Segoe UI"/>
                         </a:rPr>
-                        <a:t>Non-Fleet Bound Premium: $260,293.08</a:t>
+                        <a:t>Non-Fleet Bound Premium: $275,732.08</a:t>
                       </a:r>
                     </a:p>
                   </a:txBody>
@@ -4428,7 +4428,7 @@
                           </a:solidFill>
                           <a:latin typeface="Segoe UI"/>
                         </a:rPr>
-                        <a:t>60</a:t>
+                        <a:t>62</a:t>
                       </a:r>
                     </a:p>
                   </a:txBody>
@@ -4624,7 +4624,7 @@
                           </a:solidFill>
                           <a:latin typeface="Segoe UI"/>
                         </a:rPr>
-                        <a:t>7.0%</a:t>
+                        <a:t>7.9%</a:t>
                       </a:r>
                     </a:p>
                   </a:txBody>
@@ -4707,7 +4707,7 @@
                           </a:solidFill>
                           <a:latin typeface="Segoe UI"/>
                         </a:rPr>
-                        <a:t>1.7%</a:t>
+                        <a:t>1.6%</a:t>
                       </a:r>
                     </a:p>
                   </a:txBody>
@@ -4747,7 +4747,7 @@
                         <a:rPr sz="800">
                           <a:latin typeface="Segoe UI"/>
                         </a:rPr>
-                        <a:t>14.5%</a:t>
+                        <a:t>12.9%</a:t>
                       </a:r>
                     </a:p>
                   </a:txBody>
@@ -4901,9 +4901,12 @@
                       <a:pPr algn="ctr"/>
                       <a:r>
                         <a:rPr sz="800">
+                          <a:solidFill>
+                            <a:srgbClr val="059669"/>
+                          </a:solidFill>
                           <a:latin typeface="Segoe UI"/>
                         </a:rPr>
-                        <a:t>8</a:t>
+                        <a:t>9</a:t>
                       </a:r>
                     </a:p>
                   </a:txBody>
@@ -5017,7 +5020,7 @@
                         <a:rPr sz="800">
                           <a:latin typeface="Segoe UI"/>
                         </a:rPr>
-                        <a:t>9</a:t>
+                        <a:t>8</a:t>
                       </a:r>
                     </a:p>
                   </a:txBody>
@@ -5259,7 +5262,7 @@
                           </a:solidFill>
                           <a:latin typeface="Segoe UI"/>
                         </a:rPr>
-                        <a:t>$112.0K</a:t>
+                        <a:t>$127.4K</a:t>
                       </a:r>
                     </a:p>
                   </a:txBody>

--- a/generated/Tier 1 Broker Scorecards/Streetsmart Risk Managers Inc_Broker_Scorecard.pptx
+++ b/generated/Tier 1 Broker Scorecards/Streetsmart Risk Managers Inc_Broker_Scorecard.pptx
@@ -3394,7 +3394,7 @@
                         <a:rPr sz="900">
                           <a:latin typeface="Segoe UI"/>
                         </a:rPr>
-                        <a:t>Tier 1  |  3.56% / 15.00%</a:t>
+                        <a:t>Tier 1  |  3.54% / 15.00%</a:t>
                       </a:r>
                     </a:p>
                   </a:txBody>
@@ -3653,7 +3653,7 @@
                         <a:rPr sz="900">
                           <a:latin typeface="Segoe UI"/>
                         </a:rPr>
-                        <a:t>Fleet Subs: 30  |  Binds: 0</a:t>
+                        <a:t>Fleet Subs: 31  |  Binds: 0</a:t>
                       </a:r>
                     </a:p>
                   </a:txBody>
@@ -3766,7 +3766,7 @@
                         <a:rPr sz="900">
                           <a:latin typeface="Segoe UI"/>
                         </a:rPr>
-                        <a:t>Non-Fleet Subs: 335  |  Binds: 13</a:t>
+                        <a:t>Non-Fleet Subs: 336  |  Binds: 13</a:t>
                       </a:r>
                     </a:p>
                   </a:txBody>
@@ -4428,7 +4428,7 @@
                           </a:solidFill>
                           <a:latin typeface="Segoe UI"/>
                         </a:rPr>
-                        <a:t>62</a:t>
+                        <a:t>64</a:t>
                       </a:r>
                     </a:p>
                   </a:txBody>

--- a/generated/Tier 1 Broker Scorecards/Streetsmart Risk Managers Inc_Broker_Scorecard.pptx
+++ b/generated/Tier 1 Broker Scorecards/Streetsmart Risk Managers Inc_Broker_Scorecard.pptx
@@ -3394,7 +3394,7 @@
                         <a:rPr sz="900">
                           <a:latin typeface="Segoe UI"/>
                         </a:rPr>
-                        <a:t>Tier 1  |  3.54% / 15.00%</a:t>
+                        <a:t>Tier 1  |  3.48% / 15.00%</a:t>
                       </a:r>
                     </a:p>
                   </a:txBody>
@@ -3766,7 +3766,7 @@
                         <a:rPr sz="900">
                           <a:latin typeface="Segoe UI"/>
                         </a:rPr>
-                        <a:t>Non-Fleet Subs: 336  |  Binds: 13</a:t>
+                        <a:t>Non-Fleet Subs: 343  |  Binds: 13</a:t>
                       </a:r>
                     </a:p>
                   </a:txBody>
@@ -4428,7 +4428,7 @@
                           </a:solidFill>
                           <a:latin typeface="Segoe UI"/>
                         </a:rPr>
-                        <a:t>64</a:t>
+                        <a:t>71</a:t>
                       </a:r>
                     </a:p>
                   </a:txBody>
@@ -4707,7 +4707,7 @@
                           </a:solidFill>
                           <a:latin typeface="Segoe UI"/>
                         </a:rPr>
-                        <a:t>1.6%</a:t>
+                        <a:t>1.4%</a:t>
                       </a:r>
                     </a:p>
                   </a:txBody>
@@ -4747,7 +4747,7 @@
                         <a:rPr sz="800">
                           <a:latin typeface="Segoe UI"/>
                         </a:rPr>
-                        <a:t>12.9%</a:t>
+                        <a:t>14.5%</a:t>
                       </a:r>
                     </a:p>
                   </a:txBody>
@@ -5020,7 +5020,7 @@
                         <a:rPr sz="800">
                           <a:latin typeface="Segoe UI"/>
                         </a:rPr>
-                        <a:t>8</a:t>
+                        <a:t>9</a:t>
                       </a:r>
                     </a:p>
                   </a:txBody>

--- a/generated/Tier 1 Broker Scorecards/Streetsmart Risk Managers Inc_Broker_Scorecard.pptx
+++ b/generated/Tier 1 Broker Scorecards/Streetsmart Risk Managers Inc_Broker_Scorecard.pptx
@@ -3394,7 +3394,7 @@
                         <a:rPr sz="900">
                           <a:latin typeface="Segoe UI"/>
                         </a:rPr>
-                        <a:t>Tier 1  |  3.48% / 15.00%</a:t>
+                        <a:t>Tier 1  |  3.17% / 15.00%</a:t>
                       </a:r>
                     </a:p>
                   </a:txBody>
@@ -3766,7 +3766,7 @@
                         <a:rPr sz="900">
                           <a:latin typeface="Segoe UI"/>
                         </a:rPr>
-                        <a:t>Non-Fleet Subs: 343  |  Binds: 13</a:t>
+                        <a:t>Non-Fleet Subs: 348  |  Binds: 12</a:t>
                       </a:r>
                     </a:p>
                   </a:txBody>
@@ -4428,7 +4428,7 @@
                           </a:solidFill>
                           <a:latin typeface="Segoe UI"/>
                         </a:rPr>
-                        <a:t>71</a:t>
+                        <a:t>79</a:t>
                       </a:r>
                     </a:p>
                   </a:txBody>
@@ -4707,7 +4707,7 @@
                           </a:solidFill>
                           <a:latin typeface="Segoe UI"/>
                         </a:rPr>
-                        <a:t>1.4%</a:t>
+                        <a:t>2.5%</a:t>
                       </a:r>
                     </a:p>
                   </a:txBody>
@@ -4983,7 +4983,7 @@
                           </a:solidFill>
                           <a:latin typeface="Segoe UI"/>
                         </a:rPr>
-                        <a:t>1</a:t>
+                        <a:t>2</a:t>
                       </a:r>
                     </a:p>
                   </a:txBody>

--- a/generated/Tier 1 Broker Scorecards/Streetsmart Risk Managers Inc_Broker_Scorecard.pptx
+++ b/generated/Tier 1 Broker Scorecards/Streetsmart Risk Managers Inc_Broker_Scorecard.pptx
@@ -3357,7 +3357,7 @@
                         <a:rPr sz="800">
                           <a:latin typeface="Segoe UI"/>
                         </a:rPr>
-                        <a:t>$1,382,793.83 / $1,205,943.29 / $275,732.08</a:t>
+                        <a:t>$1,382,793.83 / $1,247,975.88 / $317,764.67</a:t>
                       </a:r>
                     </a:p>
                   </a:txBody>
@@ -3431,7 +3431,7 @@
                         <a:rPr sz="900">
                           <a:latin typeface="Segoe UI"/>
                         </a:rPr>
-                        <a:t>$1,935,911.36  (14.2% achieved)</a:t>
+                        <a:t>$1,935,911.36  (16.4% achieved)</a:t>
                       </a:r>
                     </a:p>
                   </a:txBody>
@@ -3803,7 +3803,7 @@
                         <a:rPr sz="900">
                           <a:latin typeface="Segoe UI"/>
                         </a:rPr>
-                        <a:t>Non-Fleet Bound Premium: $275,732.08</a:t>
+                        <a:t>Non-Fleet Bound Premium: $317,764.67</a:t>
                       </a:r>
                     </a:p>
                   </a:txBody>
@@ -4747,7 +4747,7 @@
                         <a:rPr sz="800">
                           <a:latin typeface="Segoe UI"/>
                         </a:rPr>
-                        <a:t>14.5%</a:t>
+                        <a:t>12.9%</a:t>
                       </a:r>
                     </a:p>
                   </a:txBody>
@@ -5020,7 +5020,7 @@
                         <a:rPr sz="800">
                           <a:latin typeface="Segoe UI"/>
                         </a:rPr>
-                        <a:t>9</a:t>
+                        <a:t>8</a:t>
                       </a:r>
                     </a:p>
                   </a:txBody>
@@ -5258,11 +5258,11 @@
                       <a:r>
                         <a:rPr sz="800" b="1">
                           <a:solidFill>
-                            <a:srgbClr val="DC2626"/>
+                            <a:srgbClr val="059669"/>
                           </a:solidFill>
                           <a:latin typeface="Segoe UI"/>
                         </a:rPr>
-                        <a:t>$127.4K</a:t>
+                        <a:t>$169.5K</a:t>
                       </a:r>
                     </a:p>
                   </a:txBody>

--- a/generated/Tier 1 Broker Scorecards/Streetsmart Risk Managers Inc_Broker_Scorecard.pptx
+++ b/generated/Tier 1 Broker Scorecards/Streetsmart Risk Managers Inc_Broker_Scorecard.pptx
@@ -4747,7 +4747,7 @@
                         <a:rPr sz="800">
                           <a:latin typeface="Segoe UI"/>
                         </a:rPr>
-                        <a:t>12.9%</a:t>
+                        <a:t>11.3%</a:t>
                       </a:r>
                     </a:p>
                   </a:txBody>
@@ -5020,7 +5020,7 @@
                         <a:rPr sz="800">
                           <a:latin typeface="Segoe UI"/>
                         </a:rPr>
-                        <a:t>8</a:t>
+                        <a:t>7</a:t>
                       </a:r>
                     </a:p>
                   </a:txBody>

--- a/generated/Tier 1 Broker Scorecards/Streetsmart Risk Managers Inc_Broker_Scorecard.pptx
+++ b/generated/Tier 1 Broker Scorecards/Streetsmart Risk Managers Inc_Broker_Scorecard.pptx
@@ -3357,7 +3357,7 @@
                         <a:rPr sz="800">
                           <a:latin typeface="Segoe UI"/>
                         </a:rPr>
-                        <a:t>$1,382,793.83 / $1,247,975.88 / $317,764.67</a:t>
+                        <a:t>$1,382,793.83 / $1,102,100.55 / $317,764.67</a:t>
                       </a:r>
                     </a:p>
                   </a:txBody>
